--- a/eDiscovery/Vision Diagrams-eDiscovery.pptx
+++ b/eDiscovery/Vision Diagrams-eDiscovery.pptx
@@ -140,7 +140,7 @@
 <file path=ppt/revisionInfo.xml><?xml version="1.0" encoding="utf-8"?>
 <p1510:revInfo xmlns:a="http://schemas.openxmlformats.org/drawingml/2006/main" xmlns:r="http://schemas.openxmlformats.org/officeDocument/2006/relationships" xmlns:p1510="http://schemas.microsoft.com/office/powerpoint/2015/10/main">
   <p1510:revLst>
-    <p1510:client id="{50BFB294-E278-4A30-B2CB-B95C21536A3B}" v="3" dt="2023-10-10T14:25:44.104"/>
+    <p1510:client id="{2FDC4477-FE22-4E8D-ABBA-AD13DD47EFE0}" v="34" dt="2026-07-08T12:17:19.034"/>
   </p1510:revLst>
 </p1510:revInfo>
 </file>
@@ -239,7 +239,7 @@
           <a:p>
             <a:fld id="{CE73B402-5B41-4304-9F9F-3BB29D09E7C0}" type="datetimeFigureOut">
               <a:rPr lang="en-US" smtClean="0"/>
-              <a:t>10/10/2023</a:t>
+              <a:t>7/8/2026</a:t>
             </a:fld>
             <a:endParaRPr lang="en-US" dirty="0"/>
           </a:p>
@@ -416,7 +416,7 @@
           <a:p>
             <a:fld id="{9DE64EF1-C5F7-4DE8-AD49-0D829DA0BD19}" type="datetimeFigureOut">
               <a:rPr lang="en-US" smtClean="0"/>
-              <a:t>10/10/2023</a:t>
+              <a:t>7/8/2026</a:t>
             </a:fld>
             <a:endParaRPr lang="en-US" dirty="0"/>
           </a:p>
@@ -904,7 +904,7 @@
                 <a:tabLst/>
                 <a:defRPr/>
               </a:pPr>
-              <a:t>10/10/2023 4:24 PM</a:t>
+              <a:t>7/8/2026 2:16 PM</a:t>
             </a:fld>
             <a:endParaRPr kumimoji="0" lang="en-US" sz="1200" b="0" i="0" u="none" strike="noStrike" kern="1200" cap="none" spc="0" normalizeH="0" baseline="0" noProof="0">
               <a:ln>
@@ -1240,7 +1240,7 @@
                 <a:tabLst/>
                 <a:defRPr/>
               </a:pPr>
-              <a:t>10/10/2023 4:24 PM</a:t>
+              <a:t>7/8/2026 2:16 PM</a:t>
             </a:fld>
             <a:endParaRPr kumimoji="0" lang="en-US" sz="1200" b="0" i="0" u="none" strike="noStrike" kern="1200" cap="none" spc="0" normalizeH="0" baseline="0" noProof="0">
               <a:ln>
@@ -2182,10 +2182,10 @@
           <p:nvPr userDrawn="1"/>
         </p:nvPicPr>
         <p:blipFill>
-          <a:blip r:embed="rId3">
+          <a:blip>
             <a:extLst>
               <a:ext uri="{96DAC541-7B7A-43D3-8B79-37D633B846F1}">
-                <asvg:svgBlip xmlns:asvg="http://schemas.microsoft.com/office/drawing/2016/SVG/main" r:embed="rId4"/>
+                <asvg:svgBlip xmlns:asvg="http://schemas.microsoft.com/office/drawing/2016/SVG/main" r:embed="rId3"/>
               </a:ext>
             </a:extLst>
           </a:blip>
@@ -4061,7 +4061,7 @@
           <a:p>
             <a:fld id="{AD39F531-7196-44FF-B448-CB882101825B}" type="datetimeFigureOut">
               <a:rPr lang="en-US" smtClean="0"/>
-              <a:t>10/10/2023</a:t>
+              <a:t>7/8/2026</a:t>
             </a:fld>
             <a:endParaRPr lang="en-US"/>
           </a:p>
@@ -9404,6 +9404,42 @@
           </a:p>
         </p:txBody>
       </p:sp>
+      <p:sp>
+        <p:nvSpPr>
+          <p:cNvPr id="4" name="TextBox 3">
+            <a:extLst>
+              <a:ext uri="{FF2B5EF4-FFF2-40B4-BE49-F238E27FC236}">
+                <a16:creationId xmlns:a16="http://schemas.microsoft.com/office/drawing/2014/main" id="{2C3101D6-7D7A-1950-AFF5-7807985259DD}"/>
+              </a:ext>
+            </a:extLst>
+          </p:cNvPr>
+          <p:cNvSpPr txBox="1"/>
+          <p:nvPr/>
+        </p:nvSpPr>
+        <p:spPr>
+          <a:xfrm>
+            <a:off x="1692435" y="6100575"/>
+            <a:ext cx="9808307" cy="307777"/>
+          </a:xfrm>
+          <a:prstGeom prst="rect">
+            <a:avLst/>
+          </a:prstGeom>
+          <a:noFill/>
+        </p:spPr>
+        <p:txBody>
+          <a:bodyPr wrap="square" lIns="0" tIns="0" rIns="0" bIns="0" rtlCol="0">
+            <a:spAutoFit/>
+          </a:bodyPr>
+          <a:lstStyle/>
+          <a:p>
+            <a:pPr algn="ctr"/>
+            <a:r>
+              <a:rPr lang="en-US" sz="2000" dirty="0"/>
+              <a:t>Major packaging update in 2025</a:t>
+            </a:r>
+          </a:p>
+        </p:txBody>
+      </p:sp>
     </p:spTree>
     <p:extLst>
       <p:ext uri="{BB962C8B-B14F-4D97-AF65-F5344CB8AC3E}">
